--- a/DR/защита.pptx
+++ b/DR/защита.pptx
@@ -111,6 +111,11 @@
       </a:defRPr>
     </a:lvl9pPr>
   </p:defaultTextStyle>
+  <p:extLst>
+    <p:ext uri="{EFAFB233-063F-42B5-8137-9DF3F51BA10A}">
+      <p15:sldGuideLst xmlns:p15="http://schemas.microsoft.com/office/powerpoint/2012/main"/>
+    </p:ext>
+  </p:extLst>
 </p:presentation>
 </file>
 
@@ -196,7 +201,7 @@
           <a:p>
             <a:fld id="{57D87C98-C836-4DCD-9292-B24B0D0B6832}" type="datetimeFigureOut">
               <a:rPr lang="bg-BG" smtClean="0"/>
-              <a:t>27.4.2026 г.</a:t>
+              <a:t>30.4.2026 г.</a:t>
             </a:fld>
             <a:endParaRPr lang="bg-BG"/>
           </a:p>
@@ -1360,7 +1365,7 @@
           <a:p>
             <a:fld id="{F2EC9C91-2632-4F22-BFB1-62130C040863}" type="datetimeFigureOut">
               <a:rPr lang="bg-BG" smtClean="0"/>
-              <a:t>27.4.2026 г.</a:t>
+              <a:t>30.4.2026 г.</a:t>
             </a:fld>
             <a:endParaRPr lang="bg-BG"/>
           </a:p>
@@ -1611,7 +1616,7 @@
           <a:p>
             <a:fld id="{F2EC9C91-2632-4F22-BFB1-62130C040863}" type="datetimeFigureOut">
               <a:rPr lang="bg-BG" smtClean="0"/>
-              <a:t>27.4.2026 г.</a:t>
+              <a:t>30.4.2026 г.</a:t>
             </a:fld>
             <a:endParaRPr lang="bg-BG"/>
           </a:p>
@@ -1925,7 +1930,7 @@
           <a:p>
             <a:fld id="{F2EC9C91-2632-4F22-BFB1-62130C040863}" type="datetimeFigureOut">
               <a:rPr lang="bg-BG" smtClean="0"/>
-              <a:t>27.4.2026 г.</a:t>
+              <a:t>30.4.2026 г.</a:t>
             </a:fld>
             <a:endParaRPr lang="bg-BG"/>
           </a:p>
@@ -2252,7 +2257,7 @@
           <a:p>
             <a:fld id="{F2EC9C91-2632-4F22-BFB1-62130C040863}" type="datetimeFigureOut">
               <a:rPr lang="bg-BG" smtClean="0"/>
-              <a:t>27.4.2026 г.</a:t>
+              <a:t>30.4.2026 г.</a:t>
             </a:fld>
             <a:endParaRPr lang="bg-BG"/>
           </a:p>
@@ -2566,7 +2571,7 @@
           <a:p>
             <a:fld id="{F2EC9C91-2632-4F22-BFB1-62130C040863}" type="datetimeFigureOut">
               <a:rPr lang="bg-BG" smtClean="0"/>
-              <a:t>27.4.2026 г.</a:t>
+              <a:t>30.4.2026 г.</a:t>
             </a:fld>
             <a:endParaRPr lang="bg-BG"/>
           </a:p>
@@ -2953,7 +2958,7 @@
           <a:p>
             <a:fld id="{F2EC9C91-2632-4F22-BFB1-62130C040863}" type="datetimeFigureOut">
               <a:rPr lang="bg-BG" smtClean="0"/>
-              <a:t>27.4.2026 г.</a:t>
+              <a:t>30.4.2026 г.</a:t>
             </a:fld>
             <a:endParaRPr lang="bg-BG"/>
           </a:p>
@@ -3123,7 +3128,7 @@
           <a:p>
             <a:fld id="{F2EC9C91-2632-4F22-BFB1-62130C040863}" type="datetimeFigureOut">
               <a:rPr lang="bg-BG" smtClean="0"/>
-              <a:t>27.4.2026 г.</a:t>
+              <a:t>30.4.2026 г.</a:t>
             </a:fld>
             <a:endParaRPr lang="bg-BG"/>
           </a:p>
@@ -3303,7 +3308,7 @@
           <a:p>
             <a:fld id="{F2EC9C91-2632-4F22-BFB1-62130C040863}" type="datetimeFigureOut">
               <a:rPr lang="bg-BG" smtClean="0"/>
-              <a:t>27.4.2026 г.</a:t>
+              <a:t>30.4.2026 г.</a:t>
             </a:fld>
             <a:endParaRPr lang="bg-BG"/>
           </a:p>
@@ -3479,7 +3484,7 @@
           <a:p>
             <a:fld id="{F2EC9C91-2632-4F22-BFB1-62130C040863}" type="datetimeFigureOut">
               <a:rPr lang="bg-BG" smtClean="0"/>
-              <a:t>27.4.2026 г.</a:t>
+              <a:t>30.4.2026 г.</a:t>
             </a:fld>
             <a:endParaRPr lang="bg-BG"/>
           </a:p>
@@ -3726,7 +3731,7 @@
           <a:p>
             <a:fld id="{F2EC9C91-2632-4F22-BFB1-62130C040863}" type="datetimeFigureOut">
               <a:rPr lang="bg-BG" smtClean="0"/>
-              <a:t>27.4.2026 г.</a:t>
+              <a:t>30.4.2026 г.</a:t>
             </a:fld>
             <a:endParaRPr lang="bg-BG"/>
           </a:p>
@@ -3958,7 +3963,7 @@
           <a:p>
             <a:fld id="{F2EC9C91-2632-4F22-BFB1-62130C040863}" type="datetimeFigureOut">
               <a:rPr lang="bg-BG" smtClean="0"/>
-              <a:t>27.4.2026 г.</a:t>
+              <a:t>30.4.2026 г.</a:t>
             </a:fld>
             <a:endParaRPr lang="bg-BG"/>
           </a:p>
@@ -4332,7 +4337,7 @@
           <a:p>
             <a:fld id="{F2EC9C91-2632-4F22-BFB1-62130C040863}" type="datetimeFigureOut">
               <a:rPr lang="bg-BG" smtClean="0"/>
-              <a:t>27.4.2026 г.</a:t>
+              <a:t>30.4.2026 г.</a:t>
             </a:fld>
             <a:endParaRPr lang="bg-BG"/>
           </a:p>
@@ -4455,7 +4460,7 @@
           <a:p>
             <a:fld id="{F2EC9C91-2632-4F22-BFB1-62130C040863}" type="datetimeFigureOut">
               <a:rPr lang="bg-BG" smtClean="0"/>
-              <a:t>27.4.2026 г.</a:t>
+              <a:t>30.4.2026 г.</a:t>
             </a:fld>
             <a:endParaRPr lang="bg-BG"/>
           </a:p>
@@ -4550,7 +4555,7 @@
           <a:p>
             <a:fld id="{F2EC9C91-2632-4F22-BFB1-62130C040863}" type="datetimeFigureOut">
               <a:rPr lang="bg-BG" smtClean="0"/>
-              <a:t>27.4.2026 г.</a:t>
+              <a:t>30.4.2026 г.</a:t>
             </a:fld>
             <a:endParaRPr lang="bg-BG"/>
           </a:p>
@@ -4805,7 +4810,7 @@
           <a:p>
             <a:fld id="{F2EC9C91-2632-4F22-BFB1-62130C040863}" type="datetimeFigureOut">
               <a:rPr lang="bg-BG" smtClean="0"/>
-              <a:t>27.4.2026 г.</a:t>
+              <a:t>30.4.2026 г.</a:t>
             </a:fld>
             <a:endParaRPr lang="bg-BG"/>
           </a:p>
@@ -5068,7 +5073,7 @@
           <a:p>
             <a:fld id="{F2EC9C91-2632-4F22-BFB1-62130C040863}" type="datetimeFigureOut">
               <a:rPr lang="bg-BG" smtClean="0"/>
-              <a:t>27.4.2026 г.</a:t>
+              <a:t>30.4.2026 г.</a:t>
             </a:fld>
             <a:endParaRPr lang="bg-BG"/>
           </a:p>
@@ -5813,7 +5818,7 @@
           <a:p>
             <a:fld id="{F2EC9C91-2632-4F22-BFB1-62130C040863}" type="datetimeFigureOut">
               <a:rPr lang="bg-BG" smtClean="0"/>
-              <a:t>27.4.2026 г.</a:t>
+              <a:t>30.4.2026 г.</a:t>
             </a:fld>
             <a:endParaRPr lang="bg-BG"/>
           </a:p>
